--- a/plano/TimorgianaRide - Plano de Implementacao.pptx
+++ b/plano/TimorgianaRide - Plano de Implementacao.pptx
@@ -2538,7 +2538,7 @@
                 <a:ea typeface="Calibri" pitchFamily="34" charset="-122"/>
                 <a:cs typeface="Calibri" pitchFamily="34" charset="-120"/>
               </a:rPr>
-              <a:t>Timorgiana, Lda  ·  Díli, Timor-Leste  ·  Setembro de 2026</a:t>
+              <a:t>Timorgiara Neto, Unipessoal Lda  ·  Díli, Timor-Leste  ·  Setembro de 2026</a:t>
             </a:r>
             <a:endParaRPr lang="en-US" sz="1200" dirty="0"/>
           </a:p>

--- a/plano/TimorgianaRide - Plano de Implementacao.pptx
+++ b/plano/TimorgianaRide - Plano de Implementacao.pptx
@@ -2538,7 +2538,7 @@
                 <a:ea typeface="Calibri" pitchFamily="34" charset="-122"/>
                 <a:cs typeface="Calibri" pitchFamily="34" charset="-120"/>
               </a:rPr>
-              <a:t>Timorgiara Neto, Unipessoal Lda  ·  Díli, Timor-Leste  ·  Setembro de 2026</a:t>
+              <a:t>Timorgiara Neto, Unipessoal, Lda  ·  Díli, Timor-Leste  ·  Setembro de 2026</a:t>
             </a:r>
             <a:endParaRPr lang="en-US" sz="1200" dirty="0"/>
           </a:p>
